--- a/桌寵與LLM.pptx
+++ b/桌寵與LLM.pptx
@@ -6037,7 +6037,28 @@
                 <a:ea typeface="Microsoft JhengHei" pitchFamily="34" charset="-122"/>
                 <a:cs typeface="Microsoft JhengHei" pitchFamily="34" charset="-120"/>
               </a:rPr>
-              <a:t>摘要、流程 SOP、表格整理</a:t>
+              <a:t>快速摘要（抽樣）、整理表格</a:t>
+            </a:r>
+            <a:endParaRPr lang="en-US" sz="1400" dirty="0"/>
+          </a:p>
+          <a:p>
+            <a:pPr marL="342900" indent="-342900">
+              <a:lnSpc>
+                <a:spcPct val="122000"/>
+              </a:lnSpc>
+              <a:buSzPct val="100000"/>
+              <a:buChar char="•"/>
+            </a:pPr>
+            <a:r>
+              <a:rPr lang="en-US" sz="1400" dirty="0">
+                <a:solidFill>
+                  <a:srgbClr val="1E1F35"/>
+                </a:solidFill>
+                <a:latin typeface="Microsoft JhengHei" pitchFamily="34" charset="0"/>
+                <a:ea typeface="Microsoft JhengHei" pitchFamily="34" charset="-122"/>
+                <a:cs typeface="Microsoft JhengHei" pitchFamily="34" charset="-120"/>
+              </a:rPr>
+              <a:t>完整分析（不抽樣）：PPTX／PDF 逐頁讀完</a:t>
             </a:r>
             <a:endParaRPr lang="en-US" sz="1400" dirty="0"/>
           </a:p>
@@ -9366,7 +9387,7 @@
         </p:nvSpPr>
         <p:spPr>
           <a:xfrm>
-            <a:off x="868680" y="2670048"/>
+            <a:off x="868680" y="2624328"/>
             <a:ext cx="420624" cy="420624"/>
           </a:xfrm>
           <a:prstGeom prst="ellipse">
@@ -9386,7 +9407,7 @@
         </p:nvSpPr>
         <p:spPr>
           <a:xfrm>
-            <a:off x="868680" y="2670048"/>
+            <a:off x="868680" y="2624328"/>
             <a:ext cx="420624" cy="420624"/>
           </a:xfrm>
           <a:prstGeom prst="rect">
@@ -9425,7 +9446,7 @@
         </p:nvSpPr>
         <p:spPr>
           <a:xfrm>
-            <a:off x="1490472" y="2615184"/>
+            <a:off x="1490472" y="2569464"/>
             <a:ext cx="9921240" cy="548640"/>
           </a:xfrm>
           <a:prstGeom prst="rect">
@@ -9450,7 +9471,7 @@
                 <a:ea typeface="Microsoft JhengHei" pitchFamily="34" charset="-122"/>
                 <a:cs typeface="Microsoft JhengHei" pitchFamily="34" charset="-120"/>
               </a:rPr>
-              <a:t>選擇 PDF／Word／PowerPoint／Excel，等待本機索引完成。</a:t>
+              <a:t>按「選擇文件」挑 PDF／Word／PowerPoint／Excel，等待本機索引完成。</a:t>
             </a:r>
             <a:endParaRPr lang="en-US" sz="1600" dirty="0"/>
           </a:p>
@@ -9464,7 +9485,7 @@
         </p:nvSpPr>
         <p:spPr>
           <a:xfrm>
-            <a:off x="868680" y="3447288"/>
+            <a:off x="868680" y="3355848"/>
             <a:ext cx="420624" cy="420624"/>
           </a:xfrm>
           <a:prstGeom prst="ellipse">
@@ -9484,7 +9505,7 @@
         </p:nvSpPr>
         <p:spPr>
           <a:xfrm>
-            <a:off x="868680" y="3447288"/>
+            <a:off x="868680" y="3355848"/>
             <a:ext cx="420624" cy="420624"/>
           </a:xfrm>
           <a:prstGeom prst="rect">
@@ -9523,7 +9544,7 @@
         </p:nvSpPr>
         <p:spPr>
           <a:xfrm>
-            <a:off x="1490472" y="3392424"/>
+            <a:off x="1490472" y="3300984"/>
             <a:ext cx="9921240" cy="548640"/>
           </a:xfrm>
           <a:prstGeom prst="rect">
@@ -9548,7 +9569,7 @@
                 <a:ea typeface="Microsoft JhengHei" pitchFamily="34" charset="-122"/>
                 <a:cs typeface="Microsoft JhengHei" pitchFamily="34" charset="-120"/>
               </a:rPr>
-              <a:t>可執行摘要、流程 SOP、表格整理。</a:t>
+              <a:t>快速摘要（抽樣）最多取 12 個區塊；完整分析（不抽樣）逐頁讀完全文。</a:t>
             </a:r>
             <a:endParaRPr lang="en-US" sz="1600" dirty="0"/>
           </a:p>
@@ -9562,7 +9583,7 @@
         </p:nvSpPr>
         <p:spPr>
           <a:xfrm>
-            <a:off x="868680" y="4224528"/>
+            <a:off x="868680" y="4087368"/>
             <a:ext cx="420624" cy="420624"/>
           </a:xfrm>
           <a:prstGeom prst="ellipse">
@@ -9582,7 +9603,7 @@
         </p:nvSpPr>
         <p:spPr>
           <a:xfrm>
-            <a:off x="868680" y="4224528"/>
+            <a:off x="868680" y="4087368"/>
             <a:ext cx="420624" cy="420624"/>
           </a:xfrm>
           <a:prstGeom prst="rect">
@@ -9621,7 +9642,7 @@
         </p:nvSpPr>
         <p:spPr>
           <a:xfrm>
-            <a:off x="1490472" y="4169664"/>
+            <a:off x="1490472" y="4032504"/>
             <a:ext cx="9921240" cy="548640"/>
           </a:xfrm>
           <a:prstGeom prst="rect">
@@ -9646,7 +9667,7 @@
                 <a:ea typeface="Microsoft JhengHei" pitchFamily="34" charset="-122"/>
                 <a:cs typeface="Microsoft JhengHei" pitchFamily="34" charset="-120"/>
               </a:rPr>
-              <a:t>提問並查看答案下方的來源引用。</a:t>
+              <a:t>提問並查看答案下方的來源引用與涵蓋範圍。</a:t>
             </a:r>
             <a:endParaRPr lang="en-US" sz="1600" dirty="0"/>
           </a:p>
@@ -9660,7 +9681,7 @@
         </p:nvSpPr>
         <p:spPr>
           <a:xfrm>
-            <a:off x="868680" y="5349240"/>
+            <a:off x="868680" y="5257800"/>
             <a:ext cx="10634472" cy="502920"/>
           </a:xfrm>
           <a:prstGeom prst="rect">
@@ -9680,7 +9701,7 @@
         </p:nvSpPr>
         <p:spPr>
           <a:xfrm>
-            <a:off x="1051560" y="5349240"/>
+            <a:off x="1051560" y="5257800"/>
             <a:ext cx="10268712" cy="502920"/>
           </a:xfrm>
           <a:prstGeom prst="rect">
@@ -9705,7 +9726,7 @@
                 <a:ea typeface="Microsoft JhengHei" pitchFamily="34" charset="-122"/>
                 <a:cs typeface="Microsoft JhengHei" pitchFamily="34" charset="-120"/>
               </a:rPr>
-              <a:t>建議問題：誰需要批准？這份文件在說什麼？有哪些注意事項？</a:t>
+              <a:t>分析結果會自動保存；關閉程式後重新選取同一份文件，會帶回上次結果。</a:t>
             </a:r>
             <a:endParaRPr lang="en-US" sz="1350" dirty="0"/>
           </a:p>
@@ -9719,7 +9740,7 @@
         </p:nvSpPr>
         <p:spPr>
           <a:xfrm>
-            <a:off x="868680" y="5989320"/>
+            <a:off x="868680" y="5669280"/>
             <a:ext cx="10634472" cy="502920"/>
           </a:xfrm>
           <a:prstGeom prst="rect">
@@ -9739,7 +9760,66 @@
         </p:nvSpPr>
         <p:spPr>
           <a:xfrm>
-            <a:off x="1051560" y="5989320"/>
+            <a:off x="1051560" y="5669280"/>
+            <a:ext cx="10268712" cy="502920"/>
+          </a:xfrm>
+          <a:prstGeom prst="rect">
+            <a:avLst/>
+          </a:prstGeom>
+          <a:noFill/>
+          <a:ln/>
+        </p:spPr>
+        <p:txBody>
+          <a:bodyPr wrap="square" lIns="0" tIns="0" rIns="0" bIns="0" rtlCol="0" anchor="ctr"/>
+          <a:lstStyle/>
+          <a:p>
+            <a:pPr indent="0" marL="0">
+              <a:buNone/>
+            </a:pPr>
+            <a:r>
+              <a:rPr lang="en-US" sz="1350" dirty="0">
+                <a:solidFill>
+                  <a:srgbClr val="6B6E85"/>
+                </a:solidFill>
+                <a:latin typeface="Microsoft JhengHei" pitchFamily="34" charset="0"/>
+                <a:ea typeface="Microsoft JhengHei" pitchFamily="34" charset="-122"/>
+                <a:cs typeface="Microsoft JhengHei" pitchFamily="34" charset="-120"/>
+              </a:rPr>
+              <a:t>重複選取同一個檔案會沿用既有索引，不會重複解析。</a:t>
+            </a:r>
+            <a:endParaRPr lang="en-US" sz="1350" dirty="0"/>
+          </a:p>
+        </p:txBody>
+      </p:sp>
+      <p:sp>
+        <p:nvSpPr>
+          <p:cNvPr id="22" name="Shape 20"/>
+          <p:cNvSpPr/>
+          <p:nvPr/>
+        </p:nvSpPr>
+        <p:spPr>
+          <a:xfrm>
+            <a:off x="868680" y="6080760"/>
+            <a:ext cx="10634472" cy="502920"/>
+          </a:xfrm>
+          <a:prstGeom prst="rect">
+            <a:avLst/>
+          </a:prstGeom>
+          <a:solidFill>
+            <a:srgbClr val="EEF0FA"/>
+          </a:solidFill>
+          <a:ln/>
+        </p:spPr>
+      </p:sp>
+      <p:sp>
+        <p:nvSpPr>
+          <p:cNvPr id="23" name="Text 21"/>
+          <p:cNvSpPr/>
+          <p:nvPr/>
+        </p:nvSpPr>
+        <p:spPr>
+          <a:xfrm>
+            <a:off x="1051560" y="6080760"/>
             <a:ext cx="10268712" cy="502920"/>
           </a:xfrm>
           <a:prstGeom prst="rect">
